--- a/courses/俄语课件/俄语_Day7_L1.pptx
+++ b/courses/俄语课件/俄语_Day7_L1.pptx
@@ -3206,59 +3206,7 @@
       </p:sp>
       <p:sp>
         <p:nvSpPr>
-          <p:cNvPr id="5" name="Rounded Rectangle 4"/>
-          <p:cNvSpPr/>
-          <p:nvPr/>
-        </p:nvSpPr>
-        <p:spPr>
-          <a:xfrm>
-            <a:off x="1828800" y="4572000"/>
-            <a:ext cx="5486400" cy="731520"/>
-          </a:xfrm>
-          <a:prstGeom prst="roundRect">
-            <a:avLst/>
-          </a:prstGeom>
-          <a:solidFill>
-            <a:srgbClr val="4682B4"/>
-          </a:solidFill>
-          <a:ln>
-            <a:noFill/>
-          </a:ln>
-        </p:spPr>
-        <p:style>
-          <a:lnRef idx="1">
-            <a:schemeClr val="accent1"/>
-          </a:lnRef>
-          <a:fillRef idx="3">
-            <a:schemeClr val="accent1"/>
-          </a:fillRef>
-          <a:effectRef idx="2">
-            <a:schemeClr val="accent1"/>
-          </a:effectRef>
-          <a:fontRef idx="minor">
-            <a:schemeClr val="lt1"/>
-          </a:fontRef>
-        </p:style>
-        <p:txBody>
-          <a:bodyPr rtlCol="0" anchor="ctr"/>
-          <a:lstStyle/>
-          <a:p>
-            <a:pPr algn="ctr">
-              <a:defRPr sz="2200">
-                <a:solidFill>
-                  <a:srgbClr val="FFFFFF"/>
-                </a:solidFill>
-              </a:defRPr>
-            </a:pPr>
-            <a:r>
-              <a:t>Soglasovaniye 2</a:t>
-            </a:r>
-          </a:p>
-        </p:txBody>
-      </p:sp>
-      <p:sp>
-        <p:nvSpPr>
-          <p:cNvPr id="6" name="TextBox 5"/>
+          <p:cNvPr id="5" name="TextBox 4"/>
           <p:cNvSpPr txBox="1"/>
           <p:nvPr/>
         </p:nvSpPr>
@@ -3286,7 +3234,7 @@
               </a:defRPr>
             </a:pPr>
             <a:r>
-              <a:t>Day7/84</a:t>
+              <a:t>День 7/84</a:t>
             </a:r>
           </a:p>
         </p:txBody>
@@ -3417,7 +3365,7 @@
               </a:defRPr>
             </a:pPr>
             <a:r>
-              <a:t>Sredniy rod</a:t>
+              <a:t>Средний род</a:t>
             </a:r>
           </a:p>
         </p:txBody>
@@ -3452,7 +3400,7 @@
               </a:defRPr>
             </a:pPr>
             <a:r>
-              <a:t>以 -ое / -ee 结尾的形容词：</a:t>
+              <a:t>以 -ое / -ее 结尾的形容词：</a:t>
             </a:r>
           </a:p>
         </p:txBody>
@@ -3679,7 +3627,7 @@
               </a:defRPr>
             </a:pPr>
             <a:r>
-              <a:t>Day7/84</a:t>
+              <a:t>День 7/84</a:t>
             </a:r>
           </a:p>
         </p:txBody>
@@ -3810,7 +3758,7 @@
               </a:defRPr>
             </a:pPr>
             <a:r>
-              <a:t>Kratkaya forma</a:t>
+              <a:t>Краткая форма</a:t>
             </a:r>
           </a:p>
         </p:txBody>
@@ -3880,7 +3828,7 @@
               </a:defRPr>
             </a:pPr>
             <a:r>
-              <a:t>Он красивый. &gt; Он красив. (他帅)</a:t>
+              <a:t>Он красивый. → Он красив. (他帅)</a:t>
             </a:r>
           </a:p>
         </p:txBody>
@@ -3915,7 +3863,7 @@
               </a:defRPr>
             </a:pPr>
             <a:r>
-              <a:t>Она красивая. &gt; Она красива. (她漂亮)</a:t>
+              <a:t>Она красивая. → Она красива. (她漂亮)</a:t>
             </a:r>
           </a:p>
         </p:txBody>
@@ -4002,7 +3950,7 @@
               </a:defRPr>
             </a:pPr>
             <a:r>
-              <a:t>Этот дом bolshoy. &gt; Этот дом bolen. (这房子大)</a:t>
+              <a:t>Этот дом большой. → Этот дом болен. (这房子大)</a:t>
             </a:r>
           </a:p>
         </p:txBody>
@@ -4089,7 +4037,7 @@
               </a:defRPr>
             </a:pPr>
             <a:r>
-              <a:t>Day7/84</a:t>
+              <a:t>День 7/84</a:t>
             </a:r>
           </a:p>
         </p:txBody>
@@ -4220,7 +4168,7 @@
               </a:defRPr>
             </a:pPr>
             <a:r>
-              <a:t>Uprazhneniya</a:t>
+              <a:t>Упражнения</a:t>
             </a:r>
           </a:p>
         </p:txBody>
@@ -4325,7 +4273,7 @@
               </a:defRPr>
             </a:pPr>
             <a:r>
-              <a:t>   новый ___ (книга, письмо, студент)</a:t>
+              <a:t>   новый ___ (книга, письмо, студдент)</a:t>
             </a:r>
           </a:p>
         </p:txBody>
@@ -4462,7 +4410,7 @@
               </a:defRPr>
             </a:pPr>
             <a:r>
-              <a:t>   ___ студент (умный/умная/умное)</a:t>
+              <a:t>   ___ студдент (умный/умная/умное)</a:t>
             </a:r>
           </a:p>
         </p:txBody>
@@ -4497,7 +4445,7 @@
               </a:defRPr>
             </a:pPr>
             <a:r>
-              <a:t>Day7/84</a:t>
+              <a:t>День 7/84</a:t>
             </a:r>
           </a:p>
         </p:txBody>
